--- a/generated_presentation.pptx
+++ b/generated_presentation.pptx
@@ -8,8 +8,6 @@
     <p:sldId id="256" r:id="rId7"/>
     <p:sldId id="257" r:id="rId8"/>
     <p:sldId id="258" r:id="rId9"/>
-    <p:sldId id="259" r:id="rId10"/>
-    <p:sldId id="260" r:id="rId11"/>
   </p:sldIdLst>
   <p:sldSz cx="9144000" cy="6858000" type="screen4x3"/>
   <p:notesSz cx="6858000" cy="9144000"/>
@@ -3108,7 +3106,7 @@
           <a:lstStyle/>
           <a:p>
             <a:r>
-              <a:t>Introduction to Data</a:t>
+              <a:t>Introduction to Information</a:t>
             </a:r>
           </a:p>
         </p:txBody>
@@ -3129,17 +3127,17 @@
           <a:lstStyle/>
           <a:p>
             <a:r>
-              <a:t>* Data refers to the collection of facts, figures, and statistics that are used to inform decisions or solve problems</a:t>
-            </a:r>
-          </a:p>
-          <a:p>
-            <a:r>
-              <a:t>* It can be in the form of numbers, text, images, or other types of information</a:t>
-            </a:r>
-          </a:p>
-          <a:p>
-            <a:r>
-              <a:t>* Data is a crucial component in various fields such as business, science, healthcare, and technology</a:t>
+              <a:t>* Information refers to knowledge or facts learned, discovered, or communicated about a particular subject or situation</a:t>
+            </a:r>
+          </a:p>
+          <a:p>
+            <a:r>
+              <a:t>* It can be in the form of data, messages, or instructions that provide understanding or insight</a:t>
+            </a:r>
+          </a:p>
+          <a:p>
+            <a:r>
+              <a:t>* Information is a vital component of decision-making, problem-solving, and learning in various aspects of life</a:t>
             </a:r>
           </a:p>
         </p:txBody>
@@ -3178,7 +3176,7 @@
           <a:lstStyle/>
           <a:p>
             <a:r>
-              <a:t>Types of Data</a:t>
+              <a:t>Characteristics of Information</a:t>
             </a:r>
           </a:p>
         </p:txBody>
@@ -3199,17 +3197,17 @@
           <a:lstStyle/>
           <a:p>
             <a:r>
-              <a:t>* Quantitative data: numerical data that can be measured and expressed in numbers, such as height, weight, or temperature</a:t>
-            </a:r>
-          </a:p>
-          <a:p>
-            <a:r>
-              <a:t>* Qualitative data: non-numerical data that cannot be measured, such as opinions, attitudes, or emotions</a:t>
-            </a:r>
-          </a:p>
-          <a:p>
-            <a:r>
-              <a:t>* Mixed data: combination of both quantitative and qualitative data, such as survey responses with both numerical and text-based answers</a:t>
+              <a:t>* Information is relevant and useful, providing value to the recipient or user</a:t>
+            </a:r>
+          </a:p>
+          <a:p>
+            <a:r>
+              <a:t>* It is accurate and reliable, free from errors or biases that could mislead or misinform</a:t>
+            </a:r>
+          </a:p>
+          <a:p>
+            <a:r>
+              <a:t>* Information is timely and up-to-date, reflecting the current state of knowledge or circumstances</a:t>
             </a:r>
           </a:p>
         </p:txBody>
@@ -3248,7 +3246,7 @@
           <a:lstStyle/>
           <a:p>
             <a:r>
-              <a:t>Characteristics of Data</a:t>
+              <a:t>Types and Sources of Information</a:t>
             </a:r>
           </a:p>
         </p:txBody>
@@ -3269,172 +3267,17 @@
           <a:lstStyle/>
           <a:p>
             <a:r>
-              <a:t>* Accuracy: data should be correct and free from errors</a:t>
-            </a:r>
-          </a:p>
-          <a:p>
-            <a:r>
-              <a:t>* Relevance: data should be relevant to the problem or decision being addressed</a:t>
-            </a:r>
-          </a:p>
-          <a:p>
-            <a:r>
-              <a:t>* Timeliness: data should be up-to-date and reflect current conditions</a:t>
-            </a:r>
-          </a:p>
-          <a:p>
-            <a:r>
-              <a:t>* Completeness: data should be comprehensive and include all necessary information</a:t>
-            </a:r>
-          </a:p>
-        </p:txBody>
-      </p:sp>
-    </p:spTree>
-  </p:cSld>
-  <p:clrMapOvr>
-    <a:masterClrMapping/>
-  </p:clrMapOvr>
-</p:sld>
-</file>
-
-<file path=ppt/slides/slide4.xml><?xml version="1.0" encoding="utf-8"?>
-<p:sld xmlns:a="http://schemas.openxmlformats.org/drawingml/2006/main" xmlns:p="http://schemas.openxmlformats.org/presentationml/2006/main" xmlns:r="http://schemas.openxmlformats.org/officeDocument/2006/relationships">
-  <p:cSld>
-    <p:spTree>
-      <p:nvGrpSpPr>
-        <p:cNvPr id="1" name=""/>
-        <p:cNvGrpSpPr/>
-        <p:nvPr/>
-      </p:nvGrpSpPr>
-      <p:grpSpPr/>
-      <p:sp>
-        <p:nvSpPr>
-          <p:cNvPr id="2" name="Title 1"/>
-          <p:cNvSpPr>
-            <a:spLocks noGrp="1"/>
-          </p:cNvSpPr>
-          <p:nvPr>
-            <p:ph type="title"/>
-          </p:nvPr>
-        </p:nvSpPr>
-        <p:spPr/>
-        <p:txBody>
-          <a:bodyPr/>
-          <a:lstStyle/>
-          <a:p>
-            <a:r>
-              <a:t>Data Collection Methods</a:t>
-            </a:r>
-          </a:p>
-        </p:txBody>
-      </p:sp>
-      <p:sp>
-        <p:nvSpPr>
-          <p:cNvPr id="3" name="Content Placeholder 2"/>
-          <p:cNvSpPr>
-            <a:spLocks noGrp="1"/>
-          </p:cNvSpPr>
-          <p:nvPr>
-            <p:ph idx="1"/>
-          </p:nvPr>
-        </p:nvSpPr>
-        <p:spPr/>
-        <p:txBody>
-          <a:bodyPr/>
-          <a:lstStyle/>
-          <a:p>
-            <a:r>
-              <a:t>* Surveys and questionnaires: collecting data through self-reported responses from individuals</a:t>
-            </a:r>
-          </a:p>
-          <a:p>
-            <a:r>
-              <a:t>* Observational studies: collecting data through observation of behaviors, events, or phenomena</a:t>
-            </a:r>
-          </a:p>
-          <a:p>
-            <a:r>
-              <a:t>* Experiments: collecting data through controlled tests and trials</a:t>
-            </a:r>
-          </a:p>
-          <a:p>
-            <a:r>
-              <a:t>* Existing data sources: collecting data from existing databases, records, or documents</a:t>
-            </a:r>
-          </a:p>
-        </p:txBody>
-      </p:sp>
-    </p:spTree>
-  </p:cSld>
-  <p:clrMapOvr>
-    <a:masterClrMapping/>
-  </p:clrMapOvr>
-</p:sld>
-</file>
-
-<file path=ppt/slides/slide5.xml><?xml version="1.0" encoding="utf-8"?>
-<p:sld xmlns:a="http://schemas.openxmlformats.org/drawingml/2006/main" xmlns:p="http://schemas.openxmlformats.org/presentationml/2006/main" xmlns:r="http://schemas.openxmlformats.org/officeDocument/2006/relationships">
-  <p:cSld>
-    <p:spTree>
-      <p:nvGrpSpPr>
-        <p:cNvPr id="1" name=""/>
-        <p:cNvGrpSpPr/>
-        <p:nvPr/>
-      </p:nvGrpSpPr>
-      <p:grpSpPr/>
-      <p:sp>
-        <p:nvSpPr>
-          <p:cNvPr id="2" name="Title 1"/>
-          <p:cNvSpPr>
-            <a:spLocks noGrp="1"/>
-          </p:cNvSpPr>
-          <p:nvPr>
-            <p:ph type="title"/>
-          </p:nvPr>
-        </p:nvSpPr>
-        <p:spPr/>
-        <p:txBody>
-          <a:bodyPr/>
-          <a:lstStyle/>
-          <a:p>
-            <a:r>
-              <a:t>Importance of Data</a:t>
-            </a:r>
-          </a:p>
-        </p:txBody>
-      </p:sp>
-      <p:sp>
-        <p:nvSpPr>
-          <p:cNvPr id="3" name="Content Placeholder 2"/>
-          <p:cNvSpPr>
-            <a:spLocks noGrp="1"/>
-          </p:cNvSpPr>
-          <p:nvPr>
-            <p:ph idx="1"/>
-          </p:nvPr>
-        </p:nvSpPr>
-        <p:spPr/>
-        <p:txBody>
-          <a:bodyPr/>
-          <a:lstStyle/>
-          <a:p>
-            <a:r>
-              <a:t>* Informed decision-making: data provides the basis for making informed decisions in various fields</a:t>
-            </a:r>
-          </a:p>
-          <a:p>
-            <a:r>
-              <a:t>* Problem-solving: data helps to identify and solve problems by providing insights and trends</a:t>
-            </a:r>
-          </a:p>
-          <a:p>
-            <a:r>
-              <a:t>* Strategic planning: data informs strategic planning and forecasting by providing insights into patterns and trends</a:t>
-            </a:r>
-          </a:p>
-          <a:p>
-            <a:r>
-              <a:t>* Performance evaluation: data is used to evaluate performance and measure success in various endeavors</a:t>
+              <a:t>* There are various types of information, including factual, analytical, and evaluative information</a:t>
+            </a:r>
+          </a:p>
+          <a:p>
+            <a:r>
+              <a:t>* Information can come from diverse sources, such as books, articles, online resources, and personal experiences</a:t>
+            </a:r>
+          </a:p>
+          <a:p>
+            <a:r>
+              <a:t>* The quality and credibility of information depend on the source, methodology, and context in which it is presented or acquired</a:t>
             </a:r>
           </a:p>
         </p:txBody>
